--- a/tmp/client.pptx
+++ b/tmp/client.pptx
@@ -140,37 +140,21 @@
 </p:presentation>
 </file>
 
-<file path=ppt/revisionInfo.xml><?xml version="1.0" encoding="utf-8"?>
-<p1510:revInfo xmlns:a="http://schemas.openxmlformats.org/drawingml/2006/main" xmlns:r="http://schemas.openxmlformats.org/officeDocument/2006/relationships" xmlns:p1510="http://schemas.microsoft.com/office/powerpoint/2015/10/main">
-  <p1510:revLst>
-    <p1510:client id="{8D935CCB-463C-457E-9E67-EA440695B115}" v="42" dt="2026-09-01T09:10:48.557"/>
-  </p1510:revLst>
-</p1510:revInfo>
-</file>
-
 <file path=ppt/changesInfos/changesInfo1.xml><?xml version="1.0" encoding="utf-8"?>
 <pc:chgInfo xmlns:a="http://schemas.openxmlformats.org/drawingml/2006/main" xmlns:r="http://schemas.openxmlformats.org/officeDocument/2006/relationships" xmlns:ac="http://schemas.microsoft.com/office/drawing/2013/main/command" xmlns:pc="http://schemas.microsoft.com/office/powerpoint/2013/main/command">
   <pc:docChgLst>
     <pc:chgData name="mayur@epcorn.com" userId="8d857f4fd2d1f3c9" providerId="LiveId" clId="{4D9048F2-F110-4217-BA19-6873865FC429}"/>
     <pc:docChg chg="undo custSel modSld">
-      <pc:chgData name="mayur@epcorn.com" userId="8d857f4fd2d1f3c9" providerId="LiveId" clId="{4D9048F2-F110-4217-BA19-6873865FC429}" dt="2026-09-01T11:37:01.236" v="341" actId="1076"/>
+      <pc:chgData name="mayur@epcorn.com" userId="8d857f4fd2d1f3c9" providerId="LiveId" clId="{4D9048F2-F110-4217-BA19-6873865FC429}" dt="2026-09-23T09:26:39.839" v="409" actId="20577"/>
       <pc:docMkLst>
         <pc:docMk/>
       </pc:docMkLst>
       <pc:sldChg chg="addSp delSp modSp mod">
-        <pc:chgData name="mayur@epcorn.com" userId="8d857f4fd2d1f3c9" providerId="LiveId" clId="{4D9048F2-F110-4217-BA19-6873865FC429}" dt="2026-09-01T06:37:26.682" v="22" actId="1076"/>
+        <pc:chgData name="mayur@epcorn.com" userId="8d857f4fd2d1f3c9" providerId="LiveId" clId="{4D9048F2-F110-4217-BA19-6873865FC429}" dt="2026-09-12T09:31:40.938" v="342" actId="1036"/>
         <pc:sldMkLst>
           <pc:docMk/>
           <pc:sldMk cId="0" sldId="256"/>
         </pc:sldMkLst>
-        <pc:spChg chg="add del mod">
-          <ac:chgData name="mayur@epcorn.com" userId="8d857f4fd2d1f3c9" providerId="LiveId" clId="{4D9048F2-F110-4217-BA19-6873865FC429}" dt="2026-09-01T06:36:36.313" v="15"/>
-          <ac:spMkLst>
-            <pc:docMk/>
-            <pc:sldMk cId="0" sldId="256"/>
-            <ac:spMk id="3" creationId="{45F68221-151A-A40C-91A5-9FA714CF8708}"/>
-          </ac:spMkLst>
-        </pc:spChg>
         <pc:spChg chg="add">
           <ac:chgData name="mayur@epcorn.com" userId="8d857f4fd2d1f3c9" providerId="LiveId" clId="{4D9048F2-F110-4217-BA19-6873865FC429}" dt="2026-09-01T06:36:25.404" v="10" actId="22"/>
           <ac:spMkLst>
@@ -180,19 +164,11 @@
           </ac:spMkLst>
         </pc:spChg>
         <pc:spChg chg="add mod">
-          <ac:chgData name="mayur@epcorn.com" userId="8d857f4fd2d1f3c9" providerId="LiveId" clId="{4D9048F2-F110-4217-BA19-6873865FC429}" dt="2026-09-01T06:37:26.682" v="22" actId="1076"/>
+          <ac:chgData name="mayur@epcorn.com" userId="8d857f4fd2d1f3c9" providerId="LiveId" clId="{4D9048F2-F110-4217-BA19-6873865FC429}" dt="2026-09-12T09:31:40.938" v="342" actId="1036"/>
           <ac:spMkLst>
             <pc:docMk/>
             <pc:sldMk cId="0" sldId="256"/>
             <ac:spMk id="7" creationId="{D9D5C3F8-1A02-CB9B-5A4B-FF0B34FFFA59}"/>
-          </ac:spMkLst>
-        </pc:spChg>
-        <pc:spChg chg="add del">
-          <ac:chgData name="mayur@epcorn.com" userId="8d857f4fd2d1f3c9" providerId="LiveId" clId="{4D9048F2-F110-4217-BA19-6873865FC429}" dt="2026-09-01T06:36:48.412" v="18" actId="22"/>
-          <ac:spMkLst>
-            <pc:docMk/>
-            <pc:sldMk cId="0" sldId="256"/>
-            <ac:spMk id="9" creationId="{819ED3C9-E6B3-82E3-AED1-9EC941DDF573}"/>
           </ac:spMkLst>
         </pc:spChg>
         <pc:spChg chg="add mod">
@@ -203,14 +179,6 @@
             <ac:spMk id="12" creationId="{43E1D44B-60BC-CC75-99D6-7E68189178A3}"/>
           </ac:spMkLst>
         </pc:spChg>
-        <pc:picChg chg="del mod">
-          <ac:chgData name="mayur@epcorn.com" userId="8d857f4fd2d1f3c9" providerId="LiveId" clId="{4D9048F2-F110-4217-BA19-6873865FC429}" dt="2026-09-01T06:36:36.308" v="13" actId="478"/>
-          <ac:picMkLst>
-            <pc:docMk/>
-            <pc:sldMk cId="0" sldId="256"/>
-            <ac:picMk id="13" creationId="{4F6903AE-4800-5D4B-332E-0A9B43F52DBB}"/>
-          </ac:picMkLst>
-        </pc:picChg>
       </pc:sldChg>
       <pc:sldChg chg="modSp mod">
         <pc:chgData name="mayur@epcorn.com" userId="8d857f4fd2d1f3c9" providerId="LiveId" clId="{4D9048F2-F110-4217-BA19-6873865FC429}" dt="2026-09-01T07:08:00.996" v="167" actId="403"/>
@@ -433,38 +401,6 @@
             <ac:spMk id="28" creationId="{00000000-0000-0000-0000-000000000000}"/>
           </ac:spMkLst>
         </pc:spChg>
-        <pc:spChg chg="add mod">
-          <ac:chgData name="mayur@epcorn.com" userId="8d857f4fd2d1f3c9" providerId="LiveId" clId="{4D9048F2-F110-4217-BA19-6873865FC429}" dt="2026-09-01T07:03:47.242" v="132" actId="1076"/>
-          <ac:spMkLst>
-            <pc:docMk/>
-            <pc:sldMk cId="0" sldId="258"/>
-            <ac:spMk id="31" creationId="{9A3FDC54-2B26-1EFB-E06A-A4F8246CEFFF}"/>
-          </ac:spMkLst>
-        </pc:spChg>
-        <pc:spChg chg="add mod">
-          <ac:chgData name="mayur@epcorn.com" userId="8d857f4fd2d1f3c9" providerId="LiveId" clId="{4D9048F2-F110-4217-BA19-6873865FC429}" dt="2026-09-01T07:04:10.898" v="136" actId="1076"/>
-          <ac:spMkLst>
-            <pc:docMk/>
-            <pc:sldMk cId="0" sldId="258"/>
-            <ac:spMk id="33" creationId="{68141844-0D7B-CE6F-E9BC-018DFB91258D}"/>
-          </ac:spMkLst>
-        </pc:spChg>
-        <pc:spChg chg="add del mod">
-          <ac:chgData name="mayur@epcorn.com" userId="8d857f4fd2d1f3c9" providerId="LiveId" clId="{4D9048F2-F110-4217-BA19-6873865FC429}" dt="2026-09-01T07:16:33.575" v="171"/>
-          <ac:spMkLst>
-            <pc:docMk/>
-            <pc:sldMk cId="0" sldId="258"/>
-            <ac:spMk id="34" creationId="{08ABF0C7-CB51-4C5F-E021-02D966483675}"/>
-          </ac:spMkLst>
-        </pc:spChg>
-        <pc:spChg chg="add del mod">
-          <ac:chgData name="mayur@epcorn.com" userId="8d857f4fd2d1f3c9" providerId="LiveId" clId="{4D9048F2-F110-4217-BA19-6873865FC429}" dt="2026-09-01T07:16:35.212" v="174"/>
-          <ac:spMkLst>
-            <pc:docMk/>
-            <pc:sldMk cId="0" sldId="258"/>
-            <ac:spMk id="35" creationId="{C006B5EF-6447-486B-B9DB-0B18D6B59CDE}"/>
-          </ac:spMkLst>
-        </pc:spChg>
         <pc:spChg chg="mod">
           <ac:chgData name="mayur@epcorn.com" userId="8d857f4fd2d1f3c9" providerId="LiveId" clId="{4D9048F2-F110-4217-BA19-6873865FC429}" dt="2026-09-01T09:01:15.359" v="213" actId="20577"/>
           <ac:spMkLst>
@@ -584,6 +520,185 @@
             <ac:spMk id="100" creationId="{E8CE9FDF-FF25-C322-3989-72BE9DD31332}"/>
           </ac:spMkLst>
         </pc:spChg>
+      </pc:sldChg>
+      <pc:sldChg chg="modSp mod">
+        <pc:chgData name="mayur@epcorn.com" userId="8d857f4fd2d1f3c9" providerId="LiveId" clId="{4D9048F2-F110-4217-BA19-6873865FC429}" dt="2026-09-23T09:26:39.839" v="409" actId="20577"/>
+        <pc:sldMkLst>
+          <pc:docMk/>
+          <pc:sldMk cId="0" sldId="260"/>
+        </pc:sldMkLst>
+        <pc:spChg chg="mod">
+          <ac:chgData name="mayur@epcorn.com" userId="8d857f4fd2d1f3c9" providerId="LiveId" clId="{4D9048F2-F110-4217-BA19-6873865FC429}" dt="2026-09-23T09:26:39.839" v="409" actId="20577"/>
+          <ac:spMkLst>
+            <pc:docMk/>
+            <pc:sldMk cId="0" sldId="260"/>
+            <ac:spMk id="18" creationId="{00000000-0000-0000-0000-000000000000}"/>
+          </ac:spMkLst>
+        </pc:spChg>
+      </pc:sldChg>
+      <pc:sldChg chg="addSp delSp modSp mod">
+        <pc:chgData name="mayur@epcorn.com" userId="8d857f4fd2d1f3c9" providerId="LiveId" clId="{4D9048F2-F110-4217-BA19-6873865FC429}" dt="2026-09-22T04:55:33.746" v="361"/>
+        <pc:sldMkLst>
+          <pc:docMk/>
+          <pc:sldMk cId="0" sldId="262"/>
+        </pc:sldMkLst>
+        <pc:spChg chg="add del mod">
+          <ac:chgData name="mayur@epcorn.com" userId="8d857f4fd2d1f3c9" providerId="LiveId" clId="{4D9048F2-F110-4217-BA19-6873865FC429}" dt="2026-09-22T04:55:33.746" v="361"/>
+          <ac:spMkLst>
+            <pc:docMk/>
+            <pc:sldMk cId="0" sldId="262"/>
+            <ac:spMk id="32" creationId="{52DEE471-71D9-3D8A-CA6B-957968465A54}"/>
+          </ac:spMkLst>
+        </pc:spChg>
+      </pc:sldChg>
+      <pc:sldChg chg="addSp delSp modSp mod">
+        <pc:chgData name="mayur@epcorn.com" userId="8d857f4fd2d1f3c9" providerId="LiveId" clId="{4D9048F2-F110-4217-BA19-6873865FC429}" dt="2026-09-22T05:09:51.884" v="400" actId="14100"/>
+        <pc:sldMkLst>
+          <pc:docMk/>
+          <pc:sldMk cId="330581104" sldId="265"/>
+        </pc:sldMkLst>
+        <pc:spChg chg="add mod ord">
+          <ac:chgData name="mayur@epcorn.com" userId="8d857f4fd2d1f3c9" providerId="LiveId" clId="{4D9048F2-F110-4217-BA19-6873865FC429}" dt="2026-09-22T05:09:51.884" v="400" actId="14100"/>
+          <ac:spMkLst>
+            <pc:docMk/>
+            <pc:sldMk cId="330581104" sldId="265"/>
+            <ac:spMk id="3" creationId="{EE7B78FF-A2D0-E1C8-E4EC-686D122B3199}"/>
+          </ac:spMkLst>
+        </pc:spChg>
+        <pc:spChg chg="add del mod">
+          <ac:chgData name="mayur@epcorn.com" userId="8d857f4fd2d1f3c9" providerId="LiveId" clId="{4D9048F2-F110-4217-BA19-6873865FC429}" dt="2026-09-22T05:06:55.417" v="387"/>
+          <ac:spMkLst>
+            <pc:docMk/>
+            <pc:sldMk cId="330581104" sldId="265"/>
+            <ac:spMk id="5" creationId="{F41FA3C6-939B-2E9A-1B11-8676381ACF7E}"/>
+          </ac:spMkLst>
+        </pc:spChg>
+        <pc:graphicFrameChg chg="mod modGraphic">
+          <ac:chgData name="mayur@epcorn.com" userId="8d857f4fd2d1f3c9" providerId="LiveId" clId="{4D9048F2-F110-4217-BA19-6873865FC429}" dt="2026-09-22T05:07:32.231" v="392" actId="1076"/>
+          <ac:graphicFrameMkLst>
+            <pc:docMk/>
+            <pc:sldMk cId="330581104" sldId="265"/>
+            <ac:graphicFrameMk id="2" creationId="{5A39EFE6-2E10-E16B-880C-83A9C8BFDE71}"/>
+          </ac:graphicFrameMkLst>
+        </pc:graphicFrameChg>
+        <pc:picChg chg="mod">
+          <ac:chgData name="mayur@epcorn.com" userId="8d857f4fd2d1f3c9" providerId="LiveId" clId="{4D9048F2-F110-4217-BA19-6873865FC429}" dt="2026-09-22T05:09:36.857" v="398" actId="14100"/>
+          <ac:picMkLst>
+            <pc:docMk/>
+            <pc:sldMk cId="330581104" sldId="265"/>
+            <ac:picMk id="6" creationId="{A704F283-F58D-DC1C-7D42-380FEB3C0DFF}"/>
+          </ac:picMkLst>
+        </pc:picChg>
+        <pc:picChg chg="mod">
+          <ac:chgData name="mayur@epcorn.com" userId="8d857f4fd2d1f3c9" providerId="LiveId" clId="{4D9048F2-F110-4217-BA19-6873865FC429}" dt="2026-09-22T05:09:36.857" v="398" actId="14100"/>
+          <ac:picMkLst>
+            <pc:docMk/>
+            <pc:sldMk cId="330581104" sldId="265"/>
+            <ac:picMk id="10" creationId="{C11A23A7-D514-DC18-EC92-4AF1B77891A0}"/>
+          </ac:picMkLst>
+        </pc:picChg>
+        <pc:picChg chg="mod">
+          <ac:chgData name="mayur@epcorn.com" userId="8d857f4fd2d1f3c9" providerId="LiveId" clId="{4D9048F2-F110-4217-BA19-6873865FC429}" dt="2026-09-22T05:09:36.857" v="398" actId="14100"/>
+          <ac:picMkLst>
+            <pc:docMk/>
+            <pc:sldMk cId="330581104" sldId="265"/>
+            <ac:picMk id="15" creationId="{285B7871-05F2-B035-AECA-13F48B059853}"/>
+          </ac:picMkLst>
+        </pc:picChg>
+        <pc:picChg chg="mod">
+          <ac:chgData name="mayur@epcorn.com" userId="8d857f4fd2d1f3c9" providerId="LiveId" clId="{4D9048F2-F110-4217-BA19-6873865FC429}" dt="2026-09-22T05:09:36.857" v="398" actId="14100"/>
+          <ac:picMkLst>
+            <pc:docMk/>
+            <pc:sldMk cId="330581104" sldId="265"/>
+            <ac:picMk id="17" creationId="{F4F4F1ED-B9DA-3418-3444-A18F75742607}"/>
+          </ac:picMkLst>
+        </pc:picChg>
+        <pc:picChg chg="mod">
+          <ac:chgData name="mayur@epcorn.com" userId="8d857f4fd2d1f3c9" providerId="LiveId" clId="{4D9048F2-F110-4217-BA19-6873865FC429}" dt="2026-09-22T05:09:36.857" v="398" actId="14100"/>
+          <ac:picMkLst>
+            <pc:docMk/>
+            <pc:sldMk cId="330581104" sldId="265"/>
+            <ac:picMk id="19" creationId="{DCE0C11D-7B92-0AA6-CE26-54E829CC2E38}"/>
+          </ac:picMkLst>
+        </pc:picChg>
+        <pc:picChg chg="mod">
+          <ac:chgData name="mayur@epcorn.com" userId="8d857f4fd2d1f3c9" providerId="LiveId" clId="{4D9048F2-F110-4217-BA19-6873865FC429}" dt="2026-09-22T05:09:36.857" v="398" actId="14100"/>
+          <ac:picMkLst>
+            <pc:docMk/>
+            <pc:sldMk cId="330581104" sldId="265"/>
+            <ac:picMk id="21" creationId="{91E11580-2488-31FC-5B50-4068AACB2CEE}"/>
+          </ac:picMkLst>
+        </pc:picChg>
+        <pc:picChg chg="mod">
+          <ac:chgData name="mayur@epcorn.com" userId="8d857f4fd2d1f3c9" providerId="LiveId" clId="{4D9048F2-F110-4217-BA19-6873865FC429}" dt="2026-09-22T05:09:36.857" v="398" actId="14100"/>
+          <ac:picMkLst>
+            <pc:docMk/>
+            <pc:sldMk cId="330581104" sldId="265"/>
+            <ac:picMk id="23" creationId="{51E1A263-4EAC-3506-8B86-1AE1636BB065}"/>
+          </ac:picMkLst>
+        </pc:picChg>
+        <pc:picChg chg="mod">
+          <ac:chgData name="mayur@epcorn.com" userId="8d857f4fd2d1f3c9" providerId="LiveId" clId="{4D9048F2-F110-4217-BA19-6873865FC429}" dt="2026-09-22T05:09:36.857" v="398" actId="14100"/>
+          <ac:picMkLst>
+            <pc:docMk/>
+            <pc:sldMk cId="330581104" sldId="265"/>
+            <ac:picMk id="25" creationId="{B3420962-F07C-6044-A4FB-1D547DD17F63}"/>
+          </ac:picMkLst>
+        </pc:picChg>
+        <pc:picChg chg="mod">
+          <ac:chgData name="mayur@epcorn.com" userId="8d857f4fd2d1f3c9" providerId="LiveId" clId="{4D9048F2-F110-4217-BA19-6873865FC429}" dt="2026-09-22T05:09:36.857" v="398" actId="14100"/>
+          <ac:picMkLst>
+            <pc:docMk/>
+            <pc:sldMk cId="330581104" sldId="265"/>
+            <ac:picMk id="27" creationId="{F73889BE-2CF4-62A6-AB5C-3AFA85991C08}"/>
+          </ac:picMkLst>
+        </pc:picChg>
+      </pc:sldChg>
+      <pc:sldChg chg="addSp delSp modSp mod">
+        <pc:chgData name="mayur@epcorn.com" userId="8d857f4fd2d1f3c9" providerId="LiveId" clId="{4D9048F2-F110-4217-BA19-6873865FC429}" dt="2026-09-22T05:11:20.961" v="406" actId="14100"/>
+        <pc:sldMkLst>
+          <pc:docMk/>
+          <pc:sldMk cId="2494809260" sldId="266"/>
+        </pc:sldMkLst>
+        <pc:spChg chg="add mod ord">
+          <ac:chgData name="mayur@epcorn.com" userId="8d857f4fd2d1f3c9" providerId="LiveId" clId="{4D9048F2-F110-4217-BA19-6873865FC429}" dt="2026-09-22T05:11:14.921" v="405" actId="14100"/>
+          <ac:spMkLst>
+            <pc:docMk/>
+            <pc:sldMk cId="2494809260" sldId="266"/>
+            <ac:spMk id="3" creationId="{E8702BD0-B17B-AC9A-06B2-F289B5726119}"/>
+          </ac:spMkLst>
+        </pc:spChg>
+        <pc:spChg chg="add del mod">
+          <ac:chgData name="mayur@epcorn.com" userId="8d857f4fd2d1f3c9" providerId="LiveId" clId="{4D9048F2-F110-4217-BA19-6873865FC429}" dt="2026-09-22T05:03:44.218" v="384"/>
+          <ac:spMkLst>
+            <pc:docMk/>
+            <pc:sldMk cId="2494809260" sldId="266"/>
+            <ac:spMk id="5" creationId="{411B056D-6C2C-06DD-037E-817CAB52A638}"/>
+          </ac:spMkLst>
+        </pc:spChg>
+        <pc:graphicFrameChg chg="mod modGraphic">
+          <ac:chgData name="mayur@epcorn.com" userId="8d857f4fd2d1f3c9" providerId="LiveId" clId="{4D9048F2-F110-4217-BA19-6873865FC429}" dt="2026-09-22T05:11:20.961" v="406" actId="14100"/>
+          <ac:graphicFrameMkLst>
+            <pc:docMk/>
+            <pc:sldMk cId="2494809260" sldId="266"/>
+            <ac:graphicFrameMk id="2" creationId="{7C2BB0ED-24C5-25FD-21F9-688143821BA9}"/>
+          </ac:graphicFrameMkLst>
+        </pc:graphicFrameChg>
+      </pc:sldChg>
+      <pc:sldChg chg="modSp mod">
+        <pc:chgData name="mayur@epcorn.com" userId="8d857f4fd2d1f3c9" providerId="LiveId" clId="{4D9048F2-F110-4217-BA19-6873865FC429}" dt="2026-09-22T05:12:18.143" v="407" actId="14100"/>
+        <pc:sldMkLst>
+          <pc:docMk/>
+          <pc:sldMk cId="1354141731" sldId="267"/>
+        </pc:sldMkLst>
+        <pc:picChg chg="mod">
+          <ac:chgData name="mayur@epcorn.com" userId="8d857f4fd2d1f3c9" providerId="LiveId" clId="{4D9048F2-F110-4217-BA19-6873865FC429}" dt="2026-09-22T05:12:18.143" v="407" actId="14100"/>
+          <ac:picMkLst>
+            <pc:docMk/>
+            <pc:sldMk cId="1354141731" sldId="267"/>
+            <ac:picMk id="3" creationId="{788ADC04-43C6-A3EB-030B-662AADB75354}"/>
+          </ac:picMkLst>
+        </pc:picChg>
       </pc:sldChg>
       <pc:sldChg chg="modSp mod">
         <pc:chgData name="mayur@epcorn.com" userId="8d857f4fd2d1f3c9" providerId="LiveId" clId="{4D9048F2-F110-4217-BA19-6873865FC429}" dt="2026-09-01T11:37:01.236" v="341" actId="1076"/>
@@ -846,7 +961,7 @@
           <a:p>
             <a:fld id="{F3DAA44D-322E-4924-85AF-797BC8769CA6}" type="datetimeFigureOut">
               <a:rPr lang="en-IN" smtClean="0"/>
-              <a:t>01-09-2026</a:t>
+              <a:t>23-09-2026</a:t>
             </a:fld>
             <a:endParaRPr lang="en-IN"/>
           </a:p>
@@ -1377,7 +1492,7 @@
           <a:p>
             <a:fld id="{5BCAD085-E8A6-8845-BD4E-CB4CCA059FC4}" type="datetimeFigureOut">
               <a:rPr lang="en-US" smtClean="0"/>
-              <a:t>9/1/2026</a:t>
+              <a:t>9/23/2026</a:t>
             </a:fld>
             <a:endParaRPr lang="en-US"/>
           </a:p>
@@ -1545,7 +1660,7 @@
           <a:p>
             <a:fld id="{5BCAD085-E8A6-8845-BD4E-CB4CCA059FC4}" type="datetimeFigureOut">
               <a:rPr lang="en-US" smtClean="0"/>
-              <a:t>9/1/2026</a:t>
+              <a:t>9/23/2026</a:t>
             </a:fld>
             <a:endParaRPr lang="en-US"/>
           </a:p>
@@ -1723,7 +1838,7 @@
           <a:p>
             <a:fld id="{5BCAD085-E8A6-8845-BD4E-CB4CCA059FC4}" type="datetimeFigureOut">
               <a:rPr lang="en-US" smtClean="0"/>
-              <a:t>9/1/2026</a:t>
+              <a:t>9/23/2026</a:t>
             </a:fld>
             <a:endParaRPr lang="en-US"/>
           </a:p>
@@ -1891,7 +2006,7 @@
           <a:p>
             <a:fld id="{5BCAD085-E8A6-8845-BD4E-CB4CCA059FC4}" type="datetimeFigureOut">
               <a:rPr lang="en-US" smtClean="0"/>
-              <a:t>9/1/2026</a:t>
+              <a:t>9/23/2026</a:t>
             </a:fld>
             <a:endParaRPr lang="en-US"/>
           </a:p>
@@ -2136,7 +2251,7 @@
           <a:p>
             <a:fld id="{5BCAD085-E8A6-8845-BD4E-CB4CCA059FC4}" type="datetimeFigureOut">
               <a:rPr lang="en-US" smtClean="0"/>
-              <a:t>9/1/2026</a:t>
+              <a:t>9/23/2026</a:t>
             </a:fld>
             <a:endParaRPr lang="en-US"/>
           </a:p>
@@ -2421,7 +2536,7 @@
           <a:p>
             <a:fld id="{5BCAD085-E8A6-8845-BD4E-CB4CCA059FC4}" type="datetimeFigureOut">
               <a:rPr lang="en-US" smtClean="0"/>
-              <a:t>9/1/2026</a:t>
+              <a:t>9/23/2026</a:t>
             </a:fld>
             <a:endParaRPr lang="en-US"/>
           </a:p>
@@ -2840,7 +2955,7 @@
           <a:p>
             <a:fld id="{5BCAD085-E8A6-8845-BD4E-CB4CCA059FC4}" type="datetimeFigureOut">
               <a:rPr lang="en-US" smtClean="0"/>
-              <a:t>9/1/2026</a:t>
+              <a:t>9/23/2026</a:t>
             </a:fld>
             <a:endParaRPr lang="en-US"/>
           </a:p>
@@ -2957,7 +3072,7 @@
           <a:p>
             <a:fld id="{5BCAD085-E8A6-8845-BD4E-CB4CCA059FC4}" type="datetimeFigureOut">
               <a:rPr lang="en-US" smtClean="0"/>
-              <a:t>9/1/2026</a:t>
+              <a:t>9/23/2026</a:t>
             </a:fld>
             <a:endParaRPr lang="en-US"/>
           </a:p>
@@ -3052,7 +3167,7 @@
           <a:p>
             <a:fld id="{5BCAD085-E8A6-8845-BD4E-CB4CCA059FC4}" type="datetimeFigureOut">
               <a:rPr lang="en-US" smtClean="0"/>
-              <a:t>9/1/2026</a:t>
+              <a:t>9/23/2026</a:t>
             </a:fld>
             <a:endParaRPr lang="en-US"/>
           </a:p>
@@ -3327,7 +3442,7 @@
           <a:p>
             <a:fld id="{5BCAD085-E8A6-8845-BD4E-CB4CCA059FC4}" type="datetimeFigureOut">
               <a:rPr lang="en-US" smtClean="0"/>
-              <a:t>9/1/2026</a:t>
+              <a:t>9/23/2026</a:t>
             </a:fld>
             <a:endParaRPr lang="en-US"/>
           </a:p>
@@ -3579,7 +3694,7 @@
           <a:p>
             <a:fld id="{5BCAD085-E8A6-8845-BD4E-CB4CCA059FC4}" type="datetimeFigureOut">
               <a:rPr lang="en-US" smtClean="0"/>
-              <a:t>9/1/2026</a:t>
+              <a:t>9/23/2026</a:t>
             </a:fld>
             <a:endParaRPr lang="en-US"/>
           </a:p>
@@ -3790,7 +3905,7 @@
           <a:p>
             <a:fld id="{5BCAD085-E8A6-8845-BD4E-CB4CCA059FC4}" type="datetimeFigureOut">
               <a:rPr lang="en-US" smtClean="0"/>
-              <a:t>9/1/2026</a:t>
+              <a:t>9/23/2026</a:t>
             </a:fld>
             <a:endParaRPr lang="en-US"/>
           </a:p>
@@ -4446,7 +4561,7 @@
         </p:nvSpPr>
         <p:spPr>
           <a:xfrm>
-            <a:off x="2687379" y="161119"/>
+            <a:off x="2687379" y="185182"/>
             <a:ext cx="12722174" cy="3360627"/>
           </a:xfrm>
           <a:custGeom>
@@ -6689,6 +6804,50 @@
           <a:chExt cx="0" cy="0"/>
         </a:xfrm>
       </p:grpSpPr>
+      <p:sp>
+        <p:nvSpPr>
+          <p:cNvPr id="3" name="Flowchart: Process 2">
+            <a:extLst>
+              <a:ext uri="{FF2B5EF4-FFF2-40B4-BE49-F238E27FC236}">
+                <a16:creationId xmlns:a16="http://schemas.microsoft.com/office/drawing/2014/main" id="{EE7B78FF-A2D0-E1C8-E4EC-686D122B3199}"/>
+              </a:ext>
+            </a:extLst>
+          </p:cNvPr>
+          <p:cNvSpPr/>
+          <p:nvPr/>
+        </p:nvSpPr>
+        <p:spPr>
+          <a:xfrm>
+            <a:off x="0" y="0"/>
+            <a:ext cx="18288000" cy="10287000"/>
+          </a:xfrm>
+          <a:prstGeom prst="flowChartProcess">
+            <a:avLst/>
+          </a:prstGeom>
+        </p:spPr>
+        <p:style>
+          <a:lnRef idx="2">
+            <a:schemeClr val="accent3"/>
+          </a:lnRef>
+          <a:fillRef idx="1">
+            <a:schemeClr val="lt1"/>
+          </a:fillRef>
+          <a:effectRef idx="0">
+            <a:schemeClr val="accent3"/>
+          </a:effectRef>
+          <a:fontRef idx="minor">
+            <a:schemeClr val="dk1"/>
+          </a:fontRef>
+        </p:style>
+        <p:txBody>
+          <a:bodyPr rtlCol="0" anchor="ctr"/>
+          <a:lstStyle/>
+          <a:p>
+            <a:pPr algn="ctr"/>
+            <a:endParaRPr lang="en-IN"/>
+          </a:p>
+        </p:txBody>
+      </p:sp>
       <p:graphicFrame>
         <p:nvGraphicFramePr>
           <p:cNvPr id="2" name="Table 1">
@@ -6704,14 +6863,14 @@
           <p:nvPr>
             <p:extLst>
               <p:ext uri="{D42A27DB-BD31-4B8C-83A1-F6EECF244321}">
-                <p14:modId xmlns:p14="http://schemas.microsoft.com/office/powerpoint/2010/main" val="3124157122"/>
+                <p14:modId xmlns:p14="http://schemas.microsoft.com/office/powerpoint/2010/main" val="2873590718"/>
               </p:ext>
             </p:extLst>
           </p:nvPr>
         </p:nvGraphicFramePr>
         <p:xfrm>
-          <a:off x="800101" y="845820"/>
-          <a:ext cx="16870679" cy="8365460"/>
+          <a:off x="567266" y="960770"/>
+          <a:ext cx="17153469" cy="8365460"/>
         </p:xfrm>
         <a:graphic>
           <a:graphicData uri="http://schemas.openxmlformats.org/drawingml/2006/table">
@@ -6720,63 +6879,63 @@
                 <a:tableStyleId>{2D5ABB26-0587-4C30-8999-92F81FD0307C}</a:tableStyleId>
               </a:tblPr>
               <a:tblGrid>
-                <a:gridCol w="914399">
+                <a:gridCol w="929726">
                   <a:extLst>
                     <a:ext uri="{9D8B030D-6E8A-4147-A177-3AD203B41FA5}">
                       <a16:colId xmlns:a16="http://schemas.microsoft.com/office/drawing/2014/main" val="2407328040"/>
                     </a:ext>
                   </a:extLst>
                 </a:gridCol>
-                <a:gridCol w="2377440">
+                <a:gridCol w="2417291">
                   <a:extLst>
                     <a:ext uri="{9D8B030D-6E8A-4147-A177-3AD203B41FA5}">
                       <a16:colId xmlns:a16="http://schemas.microsoft.com/office/drawing/2014/main" val="974879270"/>
                     </a:ext>
                   </a:extLst>
                 </a:gridCol>
-                <a:gridCol w="2362201">
+                <a:gridCol w="2401797">
                   <a:extLst>
                     <a:ext uri="{9D8B030D-6E8A-4147-A177-3AD203B41FA5}">
                       <a16:colId xmlns:a16="http://schemas.microsoft.com/office/drawing/2014/main" val="1420699091"/>
                     </a:ext>
                   </a:extLst>
                 </a:gridCol>
-                <a:gridCol w="1066799">
+                <a:gridCol w="1084681">
                   <a:extLst>
                     <a:ext uri="{9D8B030D-6E8A-4147-A177-3AD203B41FA5}">
                       <a16:colId xmlns:a16="http://schemas.microsoft.com/office/drawing/2014/main" val="185853320"/>
                     </a:ext>
                   </a:extLst>
                 </a:gridCol>
-                <a:gridCol w="2057400">
+                <a:gridCol w="2091887">
                   <a:extLst>
                     <a:ext uri="{9D8B030D-6E8A-4147-A177-3AD203B41FA5}">
                       <a16:colId xmlns:a16="http://schemas.microsoft.com/office/drawing/2014/main" val="2346605555"/>
                     </a:ext>
                   </a:extLst>
                 </a:gridCol>
-                <a:gridCol w="2080260">
+                <a:gridCol w="2115130">
                   <a:extLst>
                     <a:ext uri="{9D8B030D-6E8A-4147-A177-3AD203B41FA5}">
                       <a16:colId xmlns:a16="http://schemas.microsoft.com/office/drawing/2014/main" val="4017862076"/>
                     </a:ext>
                   </a:extLst>
                 </a:gridCol>
-                <a:gridCol w="1051560">
+                <a:gridCol w="1069187">
                   <a:extLst>
                     <a:ext uri="{9D8B030D-6E8A-4147-A177-3AD203B41FA5}">
                       <a16:colId xmlns:a16="http://schemas.microsoft.com/office/drawing/2014/main" val="1748295790"/>
                     </a:ext>
                   </a:extLst>
                 </a:gridCol>
-                <a:gridCol w="2331720">
+                <a:gridCol w="2370804">
                   <a:extLst>
                     <a:ext uri="{9D8B030D-6E8A-4147-A177-3AD203B41FA5}">
                       <a16:colId xmlns:a16="http://schemas.microsoft.com/office/drawing/2014/main" val="800195905"/>
                     </a:ext>
                   </a:extLst>
                 </a:gridCol>
-                <a:gridCol w="2628900">
+                <a:gridCol w="2672966">
                   <a:extLst>
                     <a:ext uri="{9D8B030D-6E8A-4147-A177-3AD203B41FA5}">
                       <a16:colId xmlns:a16="http://schemas.microsoft.com/office/drawing/2014/main" val="2191972121"/>
@@ -6794,12 +6953,18 @@
                         <a:buNone/>
                       </a:pPr>
                       <a:r>
-                        <a:rPr lang="en-IN" sz="2800">
+                        <a:rPr lang="en-IN" sz="2800" dirty="0" err="1">
                           <a:effectLst/>
                         </a:rPr>
-                        <a:t>Sr.No.</a:t>
+                        <a:t>Sr.No</a:t>
                       </a:r>
-                      <a:endParaRPr lang="en-IN" sz="2800" b="1">
+                      <a:r>
+                        <a:rPr lang="en-IN" sz="2800" dirty="0">
+                          <a:effectLst/>
+                        </a:rPr>
+                        <a:t>.</a:t>
+                      </a:r>
+                      <a:endParaRPr lang="en-IN" sz="2800" b="1" dirty="0">
                         <a:effectLst/>
                       </a:endParaRPr>
                     </a:p>
@@ -7090,12 +7255,12 @@
                         <a:buNone/>
                       </a:pPr>
                       <a:r>
-                        <a:rPr lang="en-IN" sz="2800">
+                        <a:rPr lang="en-IN" sz="2800" dirty="0">
                           <a:effectLst/>
                         </a:rPr>
                         <a:t>Picture</a:t>
                       </a:r>
-                      <a:endParaRPr lang="en-IN" sz="2800" b="1">
+                      <a:endParaRPr lang="en-IN" sz="2800" b="1" dirty="0">
                         <a:effectLst/>
                       </a:endParaRPr>
                     </a:p>
@@ -7335,12 +7500,12 @@
                         <a:buNone/>
                       </a:pPr>
                       <a:r>
-                        <a:rPr lang="en-IN" sz="2800">
+                        <a:rPr lang="en-IN" sz="2800" dirty="0">
                           <a:effectLst/>
                         </a:rPr>
                         <a:t>1</a:t>
                       </a:r>
-                      <a:endParaRPr lang="en-IN" sz="2800" b="1">
+                      <a:endParaRPr lang="en-IN" sz="2800" b="1" dirty="0">
                         <a:effectLst/>
                       </a:endParaRPr>
                     </a:p>
@@ -7503,12 +7668,12 @@
                         <a:buNone/>
                       </a:pPr>
                       <a:r>
-                        <a:rPr lang="en-IN" sz="2800">
+                        <a:rPr lang="en-IN" sz="2800" dirty="0">
                           <a:effectLst/>
                         </a:rPr>
                         <a:t>4</a:t>
                       </a:r>
-                      <a:endParaRPr lang="en-IN" sz="2800" b="1">
+                      <a:endParaRPr lang="en-IN" sz="2800" b="1" dirty="0">
                         <a:effectLst/>
                       </a:endParaRPr>
                     </a:p>
@@ -7618,7 +7783,7 @@
                       <a:pPr>
                         <a:buNone/>
                       </a:pPr>
-                      <a:endParaRPr lang="en-IN" sz="2800">
+                      <a:endParaRPr lang="en-IN" sz="2800" dirty="0">
                         <a:effectLst/>
                       </a:endParaRPr>
                     </a:p>
@@ -7729,12 +7894,18 @@
                         <a:buNone/>
                       </a:pPr>
                       <a:r>
-                        <a:rPr lang="en-IN" sz="2800">
+                        <a:rPr lang="en-IN" sz="2800" dirty="0">
                           <a:effectLst/>
                         </a:rPr>
-                        <a:t>Spider bllast</a:t>
+                        <a:t>Spider </a:t>
                       </a:r>
-                      <a:endParaRPr lang="en-IN" sz="2800" b="1">
+                      <a:r>
+                        <a:rPr lang="en-IN" sz="2800" dirty="0" err="1">
+                          <a:effectLst/>
+                        </a:rPr>
+                        <a:t>bllast</a:t>
+                      </a:r>
+                      <a:endParaRPr lang="en-IN" sz="2800" b="1" dirty="0">
                         <a:effectLst/>
                       </a:endParaRPr>
                     </a:p>
@@ -7846,12 +8017,12 @@
                         <a:buNone/>
                       </a:pPr>
                       <a:r>
-                        <a:rPr lang="en-IN" sz="2800">
+                        <a:rPr lang="en-IN" sz="2800" dirty="0">
                           <a:effectLst/>
                         </a:rPr>
                         <a:t>2</a:t>
                       </a:r>
-                      <a:endParaRPr lang="en-IN" sz="2800" b="1">
+                      <a:endParaRPr lang="en-IN" sz="2800" b="1" dirty="0">
                         <a:effectLst/>
                       </a:endParaRPr>
                     </a:p>
@@ -7904,12 +8075,24 @@
                         <a:buNone/>
                       </a:pPr>
                       <a:r>
-                        <a:rPr lang="en-IN" sz="2800">
+                        <a:rPr lang="en-IN" sz="2800" dirty="0">
                           <a:effectLst/>
                         </a:rPr>
-                        <a:t>Soto Reptout Repellent</a:t>
+                        <a:t>Soto </a:t>
                       </a:r>
-                      <a:endParaRPr lang="en-IN" sz="2800" b="1">
+                      <a:r>
+                        <a:rPr lang="en-IN" sz="2800" dirty="0" err="1">
+                          <a:effectLst/>
+                        </a:rPr>
+                        <a:t>Reptout</a:t>
+                      </a:r>
+                      <a:r>
+                        <a:rPr lang="en-IN" sz="2800" dirty="0">
+                          <a:effectLst/>
+                        </a:rPr>
+                        <a:t> Repellent</a:t>
+                      </a:r>
+                      <a:endParaRPr lang="en-IN" sz="2800" b="1" dirty="0">
                         <a:effectLst/>
                       </a:endParaRPr>
                     </a:p>
@@ -8014,12 +8197,12 @@
                         <a:buNone/>
                       </a:pPr>
                       <a:r>
-                        <a:rPr lang="en-IN" sz="2800">
+                        <a:rPr lang="en-IN" sz="2800" dirty="0">
                           <a:effectLst/>
                         </a:rPr>
                         <a:t>5</a:t>
                       </a:r>
-                      <a:endParaRPr lang="en-IN" sz="2800" b="1">
+                      <a:endParaRPr lang="en-IN" sz="2800" b="1" dirty="0">
                         <a:effectLst/>
                       </a:endParaRPr>
                     </a:p>
@@ -8072,12 +8255,12 @@
                         <a:buNone/>
                       </a:pPr>
                       <a:r>
-                        <a:rPr lang="en-IN" sz="2800">
+                        <a:rPr lang="en-IN" sz="2800" dirty="0">
                           <a:effectLst/>
                         </a:rPr>
                         <a:t>SNAPPER Insect Trapper</a:t>
                       </a:r>
-                      <a:endParaRPr lang="en-IN" sz="2800" b="1">
+                      <a:endParaRPr lang="en-IN" sz="2800" b="1" dirty="0">
                         <a:effectLst/>
                       </a:endParaRPr>
                     </a:p>
@@ -8182,12 +8365,12 @@
                         <a:buNone/>
                       </a:pPr>
                       <a:r>
-                        <a:rPr lang="en-IN" sz="2800">
+                        <a:rPr lang="en-IN" sz="2800" dirty="0">
                           <a:effectLst/>
                         </a:rPr>
                         <a:t>8</a:t>
                       </a:r>
-                      <a:endParaRPr lang="en-IN" sz="2800" b="1">
+                      <a:endParaRPr lang="en-IN" sz="2800" b="1" dirty="0">
                         <a:effectLst/>
                       </a:endParaRPr>
                     </a:p>
@@ -8240,12 +8423,12 @@
                         <a:buNone/>
                       </a:pPr>
                       <a:r>
-                        <a:rPr lang="en-IN" sz="2800">
+                        <a:rPr lang="en-IN" sz="2800" dirty="0">
                           <a:effectLst/>
                         </a:rPr>
                         <a:t>RODEIN- Rodent Bait Station</a:t>
                       </a:r>
-                      <a:endParaRPr lang="en-IN" sz="2800" b="1">
+                      <a:endParaRPr lang="en-IN" sz="2800" b="1" dirty="0">
                         <a:effectLst/>
                       </a:endParaRPr>
                     </a:p>
@@ -8357,12 +8540,12 @@
                         <a:buNone/>
                       </a:pPr>
                       <a:r>
-                        <a:rPr lang="en-IN" sz="2800">
+                        <a:rPr lang="en-IN" sz="2800" dirty="0">
                           <a:effectLst/>
                         </a:rPr>
                         <a:t>3</a:t>
                       </a:r>
-                      <a:endParaRPr lang="en-IN" sz="2800" b="1">
+                      <a:endParaRPr lang="en-IN" sz="2800" b="1" dirty="0">
                         <a:effectLst/>
                       </a:endParaRPr>
                     </a:p>
@@ -8415,12 +8598,12 @@
                         <a:buNone/>
                       </a:pPr>
                       <a:r>
-                        <a:rPr lang="en-IN" sz="2800">
+                        <a:rPr lang="en-IN" sz="2800" dirty="0">
                           <a:effectLst/>
                         </a:rPr>
                         <a:t>Soto Bird Repellent</a:t>
                       </a:r>
-                      <a:endParaRPr lang="en-IN" sz="2800" b="1">
+                      <a:endParaRPr lang="en-IN" sz="2800" b="1" dirty="0">
                         <a:effectLst/>
                       </a:endParaRPr>
                     </a:p>
@@ -8583,12 +8766,12 @@
                         <a:buNone/>
                       </a:pPr>
                       <a:r>
-                        <a:rPr lang="en-IN" sz="2800">
+                        <a:rPr lang="en-IN" sz="2800" dirty="0">
                           <a:effectLst/>
                         </a:rPr>
                         <a:t>Cockroach Trap</a:t>
                       </a:r>
-                      <a:endParaRPr lang="en-IN" sz="2800" b="1">
+                      <a:endParaRPr lang="en-IN" sz="2800" b="1" dirty="0">
                         <a:effectLst/>
                       </a:endParaRPr>
                     </a:p>
@@ -8693,12 +8876,12 @@
                         <a:buNone/>
                       </a:pPr>
                       <a:r>
-                        <a:rPr lang="en-IN" sz="2800">
+                        <a:rPr lang="en-IN" sz="2800" dirty="0">
                           <a:effectLst/>
                         </a:rPr>
                         <a:t>9</a:t>
                       </a:r>
-                      <a:endParaRPr lang="en-IN" sz="2800" b="1">
+                      <a:endParaRPr lang="en-IN" sz="2800" b="1" dirty="0">
                         <a:effectLst/>
                       </a:endParaRPr>
                     </a:p>
@@ -9208,6 +9391,50 @@
           <a:chExt cx="0" cy="0"/>
         </a:xfrm>
       </p:grpSpPr>
+      <p:sp>
+        <p:nvSpPr>
+          <p:cNvPr id="3" name="Rectangle 2">
+            <a:extLst>
+              <a:ext uri="{FF2B5EF4-FFF2-40B4-BE49-F238E27FC236}">
+                <a16:creationId xmlns:a16="http://schemas.microsoft.com/office/drawing/2014/main" id="{E8702BD0-B17B-AC9A-06B2-F289B5726119}"/>
+              </a:ext>
+            </a:extLst>
+          </p:cNvPr>
+          <p:cNvSpPr/>
+          <p:nvPr/>
+        </p:nvSpPr>
+        <p:spPr>
+          <a:xfrm>
+            <a:off x="0" y="0"/>
+            <a:ext cx="18288000" cy="10287000"/>
+          </a:xfrm>
+          <a:prstGeom prst="rect">
+            <a:avLst/>
+          </a:prstGeom>
+        </p:spPr>
+        <p:style>
+          <a:lnRef idx="2">
+            <a:schemeClr val="accent3"/>
+          </a:lnRef>
+          <a:fillRef idx="1">
+            <a:schemeClr val="lt1"/>
+          </a:fillRef>
+          <a:effectRef idx="0">
+            <a:schemeClr val="accent3"/>
+          </a:effectRef>
+          <a:fontRef idx="minor">
+            <a:schemeClr val="dk1"/>
+          </a:fontRef>
+        </p:style>
+        <p:txBody>
+          <a:bodyPr rtlCol="0" anchor="ctr"/>
+          <a:lstStyle/>
+          <a:p>
+            <a:pPr algn="ctr"/>
+            <a:endParaRPr lang="en-IN"/>
+          </a:p>
+        </p:txBody>
+      </p:sp>
       <p:graphicFrame>
         <p:nvGraphicFramePr>
           <p:cNvPr id="2" name="Table 1">
@@ -9223,14 +9450,14 @@
           <p:nvPr>
             <p:extLst>
               <p:ext uri="{D42A27DB-BD31-4B8C-83A1-F6EECF244321}">
-                <p14:modId xmlns:p14="http://schemas.microsoft.com/office/powerpoint/2010/main" val="4176116391"/>
+                <p14:modId xmlns:p14="http://schemas.microsoft.com/office/powerpoint/2010/main" val="3382951450"/>
               </p:ext>
             </p:extLst>
           </p:nvPr>
         </p:nvGraphicFramePr>
         <p:xfrm>
-          <a:off x="602170" y="315022"/>
-          <a:ext cx="17195184" cy="9656955"/>
+          <a:off x="764772" y="315022"/>
+          <a:ext cx="17032583" cy="9656955"/>
         </p:xfrm>
         <a:graphic>
           <a:graphicData uri="http://schemas.openxmlformats.org/drawingml/2006/table">
@@ -9239,63 +9466,63 @@
                 <a:tableStyleId>{2D5ABB26-0587-4C30-8999-92F81FD0307C}</a:tableStyleId>
               </a:tblPr>
               <a:tblGrid>
-                <a:gridCol w="1003609">
+                <a:gridCol w="994119">
                   <a:extLst>
                     <a:ext uri="{9D8B030D-6E8A-4147-A177-3AD203B41FA5}">
                       <a16:colId xmlns:a16="http://schemas.microsoft.com/office/drawing/2014/main" val="1501361171"/>
                     </a:ext>
                   </a:extLst>
                 </a:gridCol>
-                <a:gridCol w="2817543">
+                <a:gridCol w="2790899">
                   <a:extLst>
                     <a:ext uri="{9D8B030D-6E8A-4147-A177-3AD203B41FA5}">
                       <a16:colId xmlns:a16="http://schemas.microsoft.com/office/drawing/2014/main" val="2646553324"/>
                     </a:ext>
                   </a:extLst>
                 </a:gridCol>
-                <a:gridCol w="2401228">
+                <a:gridCol w="2378521">
                   <a:extLst>
                     <a:ext uri="{9D8B030D-6E8A-4147-A177-3AD203B41FA5}">
                       <a16:colId xmlns:a16="http://schemas.microsoft.com/office/drawing/2014/main" val="3337704139"/>
                     </a:ext>
                   </a:extLst>
                 </a:gridCol>
-                <a:gridCol w="1048215">
+                <a:gridCol w="1038303">
                   <a:extLst>
                     <a:ext uri="{9D8B030D-6E8A-4147-A177-3AD203B41FA5}">
                       <a16:colId xmlns:a16="http://schemas.microsoft.com/office/drawing/2014/main" val="2838874472"/>
                     </a:ext>
                   </a:extLst>
                 </a:gridCol>
-                <a:gridCol w="2007219">
+                <a:gridCol w="1988239">
                   <a:extLst>
                     <a:ext uri="{9D8B030D-6E8A-4147-A177-3AD203B41FA5}">
                       <a16:colId xmlns:a16="http://schemas.microsoft.com/office/drawing/2014/main" val="1517024330"/>
                     </a:ext>
                   </a:extLst>
                 </a:gridCol>
-                <a:gridCol w="2720898">
+                <a:gridCol w="2695168">
                   <a:extLst>
                     <a:ext uri="{9D8B030D-6E8A-4147-A177-3AD203B41FA5}">
                       <a16:colId xmlns:a16="http://schemas.microsoft.com/office/drawing/2014/main" val="2479888805"/>
                     </a:ext>
                   </a:extLst>
                 </a:gridCol>
-                <a:gridCol w="1048214">
+                <a:gridCol w="1038302">
                   <a:extLst>
                     <a:ext uri="{9D8B030D-6E8A-4147-A177-3AD203B41FA5}">
                       <a16:colId xmlns:a16="http://schemas.microsoft.com/office/drawing/2014/main" val="1344914437"/>
                     </a:ext>
                   </a:extLst>
                 </a:gridCol>
-                <a:gridCol w="1873405">
+                <a:gridCol w="1855690">
                   <a:extLst>
                     <a:ext uri="{9D8B030D-6E8A-4147-A177-3AD203B41FA5}">
                       <a16:colId xmlns:a16="http://schemas.microsoft.com/office/drawing/2014/main" val="3104131006"/>
                     </a:ext>
                   </a:extLst>
                 </a:gridCol>
-                <a:gridCol w="2274853">
+                <a:gridCol w="2253342">
                   <a:extLst>
                     <a:ext uri="{9D8B030D-6E8A-4147-A177-3AD203B41FA5}">
                       <a16:colId xmlns:a16="http://schemas.microsoft.com/office/drawing/2014/main" val="1400556251"/>
@@ -9848,12 +10075,12 @@
                         <a:buNone/>
                       </a:pPr>
                       <a:r>
-                        <a:rPr lang="en-IN" sz="2800">
+                        <a:rPr lang="en-IN" sz="2800" dirty="0">
                           <a:effectLst/>
                         </a:rPr>
                         <a:t>10</a:t>
                       </a:r>
-                      <a:endParaRPr lang="en-IN" sz="2800" b="1">
+                      <a:endParaRPr lang="en-IN" sz="2800" b="1" dirty="0">
                         <a:effectLst/>
                       </a:endParaRPr>
                     </a:p>
@@ -9906,12 +10133,12 @@
                         <a:buNone/>
                       </a:pPr>
                       <a:r>
-                        <a:rPr lang="en-IN" sz="2800">
+                        <a:rPr lang="en-IN" sz="2800" dirty="0">
                           <a:effectLst/>
                         </a:rPr>
                         <a:t>2 Tube Snapper HTG (Insect Trapper)</a:t>
                       </a:r>
-                      <a:endParaRPr lang="en-IN" sz="2800" b="1">
+                      <a:endParaRPr lang="en-IN" sz="2800" b="1" dirty="0">
                         <a:effectLst/>
                       </a:endParaRPr>
                     </a:p>
@@ -10074,12 +10301,12 @@
                         <a:buNone/>
                       </a:pPr>
                       <a:r>
-                        <a:rPr lang="en-IN" sz="2800">
+                        <a:rPr lang="en-IN" sz="2800" dirty="0">
                           <a:effectLst/>
                         </a:rPr>
                         <a:t>Insect Killer Sheet</a:t>
                       </a:r>
-                      <a:endParaRPr lang="en-IN" sz="2800" b="1">
+                      <a:endParaRPr lang="en-IN" sz="2800" b="1" dirty="0">
                         <a:effectLst/>
                       </a:endParaRPr>
                     </a:p>
@@ -10242,12 +10469,12 @@
                         <a:buNone/>
                       </a:pPr>
                       <a:r>
-                        <a:rPr lang="en-IN" sz="2800">
+                        <a:rPr lang="en-IN" sz="2800" dirty="0">
                           <a:effectLst/>
                         </a:rPr>
                         <a:t>Spider Machine (Insect Trapper)</a:t>
                       </a:r>
-                      <a:endParaRPr lang="en-IN" sz="2800" b="1">
+                      <a:endParaRPr lang="en-IN" sz="2800" b="1" dirty="0">
                         <a:effectLst/>
                       </a:endParaRPr>
                     </a:p>
@@ -10417,12 +10644,12 @@
                         <a:buNone/>
                       </a:pPr>
                       <a:r>
-                        <a:rPr lang="en-IN" sz="2800">
+                        <a:rPr lang="en-IN" sz="2800" dirty="0">
                           <a:effectLst/>
                         </a:rPr>
                         <a:t>3 Tube White Machine (Insect Trapper)</a:t>
                       </a:r>
-                      <a:endParaRPr lang="en-IN" sz="2800" b="1">
+                      <a:endParaRPr lang="en-IN" sz="2800" b="1" dirty="0">
                         <a:effectLst/>
                       </a:endParaRPr>
                     </a:p>
@@ -10527,12 +10754,12 @@
                         <a:buNone/>
                       </a:pPr>
                       <a:r>
-                        <a:rPr lang="en-IN" sz="2800">
+                        <a:rPr lang="en-IN" sz="2800" dirty="0">
                           <a:effectLst/>
                         </a:rPr>
                         <a:t>14</a:t>
                       </a:r>
-                      <a:endParaRPr lang="en-IN" sz="2800" b="1">
+                      <a:endParaRPr lang="en-IN" sz="2800" b="1" dirty="0">
                         <a:effectLst/>
                       </a:endParaRPr>
                     </a:p>
@@ -10585,12 +10812,18 @@
                         <a:buNone/>
                       </a:pPr>
                       <a:r>
-                        <a:rPr lang="en-IN" sz="2800">
+                        <a:rPr lang="en-IN" sz="2800" dirty="0" err="1">
                           <a:effectLst/>
                         </a:rPr>
-                        <a:t>Agarbatti Stand</a:t>
+                        <a:t>Agarbatti</a:t>
                       </a:r>
-                      <a:endParaRPr lang="en-IN" sz="2800" b="1">
+                      <a:r>
+                        <a:rPr lang="en-IN" sz="2800" dirty="0">
+                          <a:effectLst/>
+                        </a:rPr>
+                        <a:t> Stand</a:t>
+                      </a:r>
+                      <a:endParaRPr lang="en-IN" sz="2800" b="1" dirty="0">
                         <a:effectLst/>
                       </a:endParaRPr>
                     </a:p>
@@ -10753,12 +10986,18 @@
                         <a:buNone/>
                       </a:pPr>
                       <a:r>
-                        <a:rPr lang="en-IN" sz="2800">
+                        <a:rPr lang="en-IN" sz="2800" dirty="0">
                           <a:effectLst/>
                         </a:rPr>
-                        <a:t>2 Tube Insect Killer Macchine</a:t>
+                        <a:t>2 Tube Insect Killer </a:t>
                       </a:r>
-                      <a:endParaRPr lang="en-IN" sz="2800" b="1">
+                      <a:r>
+                        <a:rPr lang="en-IN" sz="2800" dirty="0" err="1">
+                          <a:effectLst/>
+                        </a:rPr>
+                        <a:t>Macchine</a:t>
+                      </a:r>
+                      <a:endParaRPr lang="en-IN" sz="2800" b="1" dirty="0">
                         <a:effectLst/>
                       </a:endParaRPr>
                     </a:p>
@@ -10928,12 +11167,24 @@
                         <a:buNone/>
                       </a:pPr>
                       <a:r>
-                        <a:rPr lang="en-IN" sz="2800">
+                        <a:rPr lang="en-IN" sz="2800" dirty="0">
                           <a:effectLst/>
                         </a:rPr>
-                        <a:t>2 Tubelight Machine (Insect Trapper)</a:t>
+                        <a:t>2 </a:t>
                       </a:r>
-                      <a:endParaRPr lang="en-IN" sz="2800" b="1">
+                      <a:r>
+                        <a:rPr lang="en-IN" sz="2800" dirty="0" err="1">
+                          <a:effectLst/>
+                        </a:rPr>
+                        <a:t>Tubelight</a:t>
+                      </a:r>
+                      <a:r>
+                        <a:rPr lang="en-IN" sz="2800" dirty="0">
+                          <a:effectLst/>
+                        </a:rPr>
+                        <a:t> Machine (Insect Trapper)</a:t>
+                      </a:r>
+                      <a:endParaRPr lang="en-IN" sz="2800" b="1" dirty="0">
                         <a:effectLst/>
                       </a:endParaRPr>
                     </a:p>
@@ -11096,12 +11347,12 @@
                         <a:buNone/>
                       </a:pPr>
                       <a:r>
-                        <a:rPr lang="en-IN" sz="2800">
+                        <a:rPr lang="en-IN" sz="2800" dirty="0">
                           <a:effectLst/>
                         </a:rPr>
                         <a:t>Samarth Incense Stick</a:t>
                       </a:r>
-                      <a:endParaRPr lang="en-IN" sz="2800" b="1">
+                      <a:endParaRPr lang="en-IN" sz="2800" b="1" dirty="0">
                         <a:effectLst/>
                       </a:endParaRPr>
                     </a:p>
@@ -12525,13 +12776,31 @@
           <a:p>
             <a:pPr algn="l"/>
             <a:r>
-              <a:rPr sz="2800" b="0">
+              <a:rPr sz="2800" b="0" dirty="0">
                 <a:solidFill>
                   <a:srgbClr val="191919"/>
                 </a:solidFill>
                 <a:latin typeface="Aptos"/>
               </a:rPr>
-              <a:t>• Live cockroach activity was recorded in Nushara Kitchen under platforms.</a:t>
+              <a:t>• Live cockroach activity was recorded in </a:t>
+            </a:r>
+            <a:r>
+              <a:rPr sz="2800" b="0" dirty="0" err="1">
+                <a:solidFill>
+                  <a:srgbClr val="191919"/>
+                </a:solidFill>
+                <a:latin typeface="Aptos"/>
+              </a:rPr>
+              <a:t>Nushara</a:t>
+            </a:r>
+            <a:r>
+              <a:rPr sz="2800" b="0" dirty="0">
+                <a:solidFill>
+                  <a:srgbClr val="191919"/>
+                </a:solidFill>
+                <a:latin typeface="Aptos"/>
+              </a:rPr>
+              <a:t> Kitchen under platforms.</a:t>
             </a:r>
           </a:p>
         </p:txBody>
@@ -12560,7 +12829,7 @@
           <a:p>
             <a:pPr algn="l"/>
             <a:r>
-              <a:rPr sz="2800" b="0">
+              <a:rPr sz="2800" b="0" dirty="0">
                 <a:solidFill>
                   <a:srgbClr val="191919"/>
                 </a:solidFill>
@@ -12595,61 +12864,44 @@
           <a:p>
             <a:pPr algn="l"/>
             <a:r>
-              <a:rPr sz="2800" b="0">
+              <a:rPr sz="2800" b="0" dirty="0">
                 <a:solidFill>
                   <a:srgbClr val="191919"/>
                 </a:solidFill>
                 <a:latin typeface="Aptos"/>
               </a:rPr>
-              <a:t>• Fresh rodent droppings were noted within shafts; rodent footprints were observed on a glueboard.</a:t>
-            </a:r>
-          </a:p>
-        </p:txBody>
-      </p:sp>
-      <p:sp>
-        <p:nvSpPr>
-          <p:cNvPr id="27" name="TextBox 26"/>
-          <p:cNvSpPr txBox="1"/>
-          <p:nvPr/>
-        </p:nvSpPr>
-        <p:spPr>
-          <a:xfrm>
-            <a:off x="685800" y="5632703"/>
-            <a:ext cx="16733520" cy="523220"/>
-          </a:xfrm>
-          <a:prstGeom prst="rect">
-            <a:avLst/>
-          </a:prstGeom>
-          <a:noFill/>
-        </p:spPr>
-        <p:txBody>
-          <a:bodyPr wrap="square" anchor="t">
-            <a:spAutoFit/>
-          </a:bodyPr>
-          <a:lstStyle/>
-          <a:p>
-            <a:pPr algn="l"/>
-            <a:r>
-              <a:rPr sz="2800" b="0">
+              <a:t>• Fresh rodent droppings were noted within shafts; rodent footprints were observed on a </a:t>
+            </a:r>
+            <a:r>
+              <a:rPr sz="2800" b="0" dirty="0" err="1">
                 <a:solidFill>
                   <a:srgbClr val="191919"/>
                 </a:solidFill>
                 <a:latin typeface="Aptos"/>
               </a:rPr>
-              <a:t>• Wall/ceiling gaps and open service shafts were identified as potential pest access/harbourage points.</a:t>
-            </a:r>
-          </a:p>
-        </p:txBody>
-      </p:sp>
-      <p:sp>
-        <p:nvSpPr>
-          <p:cNvPr id="28" name="TextBox 27"/>
+              <a:t>glueboard</a:t>
+            </a:r>
+            <a:r>
+              <a:rPr sz="2800" b="0" dirty="0">
+                <a:solidFill>
+                  <a:srgbClr val="191919"/>
+                </a:solidFill>
+                <a:latin typeface="Aptos"/>
+              </a:rPr>
+              <a:t>.</a:t>
+            </a:r>
+          </a:p>
+        </p:txBody>
+      </p:sp>
+      <p:sp>
+        <p:nvSpPr>
+          <p:cNvPr id="27" name="TextBox 26"/>
           <p:cNvSpPr txBox="1"/>
           <p:nvPr/>
         </p:nvSpPr>
         <p:spPr>
           <a:xfrm>
-            <a:off x="685800" y="6291071"/>
+            <a:off x="685800" y="5632703"/>
             <a:ext cx="16733520" cy="523220"/>
           </a:xfrm>
           <a:prstGeom prst="rect">
@@ -12665,7 +12917,60 @@
           <a:p>
             <a:pPr algn="l"/>
             <a:r>
-              <a:rPr sz="2800" b="0">
+              <a:rPr sz="2800" b="0" dirty="0">
+                <a:solidFill>
+                  <a:srgbClr val="191919"/>
+                </a:solidFill>
+                <a:latin typeface="Aptos"/>
+              </a:rPr>
+              <a:t>• Wall/ceiling gaps and open service shafts were identified as potential pest access/</a:t>
+            </a:r>
+            <a:r>
+              <a:rPr sz="2800" b="0" dirty="0" err="1">
+                <a:solidFill>
+                  <a:srgbClr val="191919"/>
+                </a:solidFill>
+                <a:latin typeface="Aptos"/>
+              </a:rPr>
+              <a:t>harbourage</a:t>
+            </a:r>
+            <a:r>
+              <a:rPr sz="2800" b="0" dirty="0">
+                <a:solidFill>
+                  <a:srgbClr val="191919"/>
+                </a:solidFill>
+                <a:latin typeface="Aptos"/>
+              </a:rPr>
+              <a:t> points.</a:t>
+            </a:r>
+          </a:p>
+        </p:txBody>
+      </p:sp>
+      <p:sp>
+        <p:nvSpPr>
+          <p:cNvPr id="28" name="TextBox 27"/>
+          <p:cNvSpPr txBox="1"/>
+          <p:nvPr/>
+        </p:nvSpPr>
+        <p:spPr>
+          <a:xfrm>
+            <a:off x="685800" y="6291071"/>
+            <a:ext cx="16733520" cy="523220"/>
+          </a:xfrm>
+          <a:prstGeom prst="rect">
+            <a:avLst/>
+          </a:prstGeom>
+          <a:noFill/>
+        </p:spPr>
+        <p:txBody>
+          <a:bodyPr wrap="square" anchor="t">
+            <a:spAutoFit/>
+          </a:bodyPr>
+          <a:lstStyle/>
+          <a:p>
+            <a:pPr algn="l"/>
+            <a:r>
+              <a:rPr sz="2800" b="0" dirty="0">
                 <a:solidFill>
                   <a:srgbClr val="191919"/>
                 </a:solidFill>
@@ -12700,7 +13005,7 @@
           <a:p>
             <a:pPr algn="l"/>
             <a:r>
-              <a:rPr sz="2800" b="0">
+              <a:rPr sz="2800" b="0" dirty="0">
                 <a:solidFill>
                   <a:srgbClr val="191919"/>
                 </a:solidFill>
@@ -18806,7 +19111,7 @@
           <a:p>
             <a:pPr algn="l"/>
             <a:r>
-              <a:rPr sz="2400" b="0">
+              <a:rPr sz="2400" b="0" dirty="0">
                 <a:solidFill>
                   <a:srgbClr val="191919"/>
                 </a:solidFill>
@@ -18931,7 +19236,7 @@
           <a:p>
             <a:pPr algn="l"/>
             <a:r>
-              <a:rPr sz="2400" b="1">
+              <a:rPr sz="2400" b="1" dirty="0">
                 <a:solidFill>
                   <a:srgbClr val="163453"/>
                 </a:solidFill>
@@ -18966,7 +19271,7 @@
           <a:p>
             <a:pPr algn="l"/>
             <a:r>
-              <a:rPr sz="2400" b="0">
+              <a:rPr sz="2400" b="0" dirty="0">
                 <a:solidFill>
                   <a:srgbClr val="191919"/>
                 </a:solidFill>
@@ -19091,7 +19396,7 @@
           <a:p>
             <a:pPr algn="l"/>
             <a:r>
-              <a:rPr sz="2400" b="1">
+              <a:rPr sz="2400" b="1" dirty="0">
                 <a:solidFill>
                   <a:srgbClr val="163453"/>
                 </a:solidFill>
@@ -19126,7 +19431,7 @@
           <a:p>
             <a:pPr algn="l"/>
             <a:r>
-              <a:rPr sz="2400" b="0">
+              <a:rPr sz="2400" b="0" dirty="0">
                 <a:solidFill>
                   <a:srgbClr val="191919"/>
                 </a:solidFill>
@@ -19251,7 +19556,7 @@
           <a:p>
             <a:pPr algn="l"/>
             <a:r>
-              <a:rPr sz="2400" b="1">
+              <a:rPr sz="2400" b="1" dirty="0">
                 <a:solidFill>
                   <a:srgbClr val="163453"/>
                 </a:solidFill>
@@ -19286,7 +19591,7 @@
           <a:p>
             <a:pPr algn="l"/>
             <a:r>
-              <a:rPr sz="2400" b="0">
+              <a:rPr sz="2400" b="0" dirty="0">
                 <a:solidFill>
                   <a:srgbClr val="191919"/>
                 </a:solidFill>
